--- a/05. DOCUMENTACION/PRESENTACION TI.1.3. RESTFUL sin BDD en JAVA GR4.pptx
+++ b/05. DOCUMENTACION/PRESENTACION TI.1.3. RESTFUL sin BDD en JAVA GR4.pptx
@@ -8402,7 +8402,7 @@
           <a:p>
             <a:r>
               <a:rPr lang="es-EC"/>
-              <a:t>Servidor [SOAP | RESTful]</a:t>
+              <a:t>Servidor RESTful</a:t>
             </a:r>
           </a:p>
         </p:txBody>
@@ -8458,7 +8458,7 @@
           <a:p>
             <a:r>
               <a:rPr lang="es-MX"/>
-              <a:t>[Tecnología] · [URL base del servicio]</a:t>
+              <a:t>Jakarta EE en Payara (JAX-RS) · http://localhost:8080/WS_CON_UNI_JAVA_RESTFUL/api</a:t>
             </a:r>
             <a:endParaRPr lang="es-EC"/>
           </a:p>
@@ -8549,7 +8549,7 @@
             </a:pPr>
             <a:r>
               <a:rPr lang="es-MX"/>
-              <a:t>Crear un proyecto [tipo de proyecto] en [IDE].</a:t>
+              <a:t>Crear un proyecto Java with Maven › Web Application en NetBeans 31.</a:t>
             </a:r>
           </a:p>
           <a:p>
@@ -8559,7 +8559,7 @@
             </a:pPr>
             <a:r>
               <a:rPr lang="es-MX"/>
-              <a:t>Nombrarlo WS_CON_UNI_[JAVA | DOTNET]_[SOAP | RESTful] con el paquete ec.edu.monster.</a:t>
+              <a:t>Nombrarlo WS_CON_UNI_JAVA_RESTFUL con el paquete ec.edu.monster.</a:t>
             </a:r>
           </a:p>
           <a:p>
@@ -8569,7 +8569,7 @@
             </a:pPr>
             <a:r>
               <a:rPr lang="es-MX"/>
-              <a:t>Configurar [servidor de aplicaciones y puerto].</a:t>
+              <a:t>Configurar Payara Server en el puerto 8080 y la ruta base /api (@ApplicationPath).</a:t>
             </a:r>
           </a:p>
           <a:p>
@@ -8579,7 +8579,7 @@
             </a:pPr>
             <a:r>
               <a:rPr lang="es-MX"/>
-              <a:t>Agregar las dependencias: [librerías].</a:t>
+              <a:t>Agregar las dependencias: jakarta.jakartaee-api 11 (incluye JAX-RS y JSON-B).</a:t>
             </a:r>
             <a:endParaRPr lang="es-EC"/>
           </a:p>
@@ -8762,7 +8762,7 @@
           <a:p>
             <a:r>
               <a:rPr lang="es-MX"/>
-              <a:t>[Servicios web SOAP | Endpoints REST]: exponen las operaciones al exterior.</a:t>
+              <a:t>Endpoints REST (LoginEndpoint, CatalogEndpoint y ConverterEndpoint): exponen las operaciones al exterior.</a:t>
             </a:r>
             <a:endParaRPr lang="es-EC"/>
           </a:p>
@@ -9607,7 +9607,7 @@
                 </a:solidFill>
                 <a:latin typeface="Segoe UI" panose="020B0502040204020203" pitchFamily="34" charset="0"/>
               </a:rPr>
-              <a:t>Rutas en este proyecto:  [login → …]  ·  [catálogo → …]  ·  [conversión → …]</a:t>
+              <a:t>Rutas en este proyecto:  login → POST /api/login  ·  catálogo → GET /api/catalog/{tipo}  ·  conversión → POST /api/converter</a:t>
             </a:r>
             <a:endParaRPr lang="es-EC" sz="1500">
               <a:solidFill>
@@ -10837,58 +10837,324 @@
           <a:p>
             <a:pPr>
               <a:lnSpc>
-                <a:spcPct val="110000"/>
+                <a:spcPct val="100000"/>
               </a:lnSpc>
+              <a:spcBef>
+                <a:spcPts val="0"/>
+              </a:spcBef>
+              <a:spcAft>
+                <a:spcPts val="0"/>
+              </a:spcAft>
             </a:pPr>
             <a:r>
-              <a:rPr lang="es-MX"/>
-              <a:t>[Pega aquí el fragmento principal:</a:t>
+              <a:rPr lang="en-US" noProof="1"/>
+              <a:t xml:space="preserve">@Path("converter")</a:t>
             </a:r>
           </a:p>
           <a:p>
             <a:pPr>
               <a:lnSpc>
-                <a:spcPct val="110000"/>
+                <a:spcPct val="100000"/>
               </a:lnSpc>
+              <a:spcBef>
+                <a:spcPts val="0"/>
+              </a:spcBef>
+              <a:spcAft>
+                <a:spcPts val="0"/>
+              </a:spcAft>
             </a:pPr>
             <a:r>
+              <a:rPr lang="en-US" noProof="1"/>
+              <a:t xml:space="preserve">public class ConverterEndpoint {</a:t>
+            </a:r>
+          </a:p>
+          <a:p>
+            <a:pPr>
+              <a:lnSpc>
+                <a:spcPct val="100000"/>
+              </a:lnSpc>
+              <a:spcBef>
+                <a:spcPts val="0"/>
+              </a:spcBef>
+              <a:spcAft>
+                <a:spcPts val="0"/>
+              </a:spcAft>
+            </a:pPr>
+            <a:r>
+              <a:rPr lang="en-US" noProof="1"/>
+              <a:t xml:space="preserve">  @POST</a:t>
+            </a:r>
+          </a:p>
+          <a:p>
+            <a:pPr>
+              <a:lnSpc>
+                <a:spcPct val="100000"/>
+              </a:lnSpc>
+              <a:spcBef>
+                <a:spcPts val="0"/>
+              </a:spcBef>
+              <a:spcAft>
+                <a:spcPts val="0"/>
+              </a:spcAft>
+            </a:pPr>
+            <a:r>
+              <a:rPr lang="en-US" noProof="1"/>
+              <a:t xml:space="preserve">  @Consumes(MediaType.APPLICATION_JSON)</a:t>
+            </a:r>
+          </a:p>
+          <a:p>
+            <a:pPr>
+              <a:lnSpc>
+                <a:spcPct val="100000"/>
+              </a:lnSpc>
+              <a:spcBef>
+                <a:spcPts val="0"/>
+              </a:spcBef>
+              <a:spcAft>
+                <a:spcPts val="0"/>
+              </a:spcAft>
+            </a:pPr>
+            <a:r>
+              <a:rPr lang="en-US" noProof="1"/>
+              <a:t xml:space="preserve">  @Produces(MediaType.APPLICATION_JSON)</a:t>
+            </a:r>
+          </a:p>
+          <a:p>
+            <a:pPr>
+              <a:lnSpc>
+                <a:spcPct val="100000"/>
+              </a:lnSpc>
+              <a:spcBef>
+                <a:spcPts val="0"/>
+              </a:spcBef>
+              <a:spcAft>
+                <a:spcPts val="0"/>
+              </a:spcAft>
+            </a:pPr>
+            <a:r>
+              <a:rPr lang="en-US" noProof="1"/>
+              <a:t xml:space="preserve">  public Response convert(</a:t>
+            </a:r>
+          </a:p>
+          <a:p>
+            <a:pPr>
+              <a:lnSpc>
+                <a:spcPct val="100000"/>
+              </a:lnSpc>
+              <a:spcBef>
+                <a:spcPts val="0"/>
+              </a:spcBef>
+              <a:spcAft>
+                <a:spcPts val="0"/>
+              </a:spcAft>
+            </a:pPr>
+            <a:r>
+              <a:rPr lang="en-US" noProof="1"/>
+              <a:t xml:space="preserve">      @HeaderParam("Authorization") String token,</a:t>
+            </a:r>
+          </a:p>
+          <a:p>
+            <a:pPr>
+              <a:lnSpc>
+                <a:spcPct val="100000"/>
+              </a:lnSpc>
+              <a:spcBef>
+                <a:spcPts val="0"/>
+              </a:spcBef>
+              <a:spcAft>
+                <a:spcPts val="0"/>
+              </a:spcAft>
+            </a:pPr>
+            <a:r>
+              <a:rPr lang="en-US" noProof="1"/>
+              <a:t xml:space="preserve">      ConvertDTO convert) {</a:t>
+            </a:r>
+          </a:p>
+          <a:p>
+            <a:pPr>
+              <a:lnSpc>
+                <a:spcPct val="100000"/>
+              </a:lnSpc>
+              <a:spcBef>
+                <a:spcPts val="0"/>
+              </a:spcBef>
+              <a:spcAft>
+                <a:spcPts val="0"/>
+              </a:spcAft>
+            </a:pPr>
+            <a:r>
+              <a:rPr lang="en-US" noProof="1"/>
+              <a:t xml:space="preserve">    ConverterResponseDTO dto;</a:t>
+            </a:r>
+          </a:p>
+          <a:p>
+            <a:pPr>
+              <a:lnSpc>
+                <a:spcPct val="100000"/>
+              </a:lnSpc>
+              <a:spcBef>
+                <a:spcPts val="0"/>
+              </a:spcBef>
+              <a:spcAft>
+                <a:spcPts val="0"/>
+              </a:spcAft>
+            </a:pPr>
+            <a:r>
+              <a:rPr lang="en-US" noProof="1"/>
+              <a:t xml:space="preserve">    if (!LoginController.validateUser(token)) {</a:t>
+            </a:r>
+          </a:p>
+          <a:p>
+            <a:pPr>
+              <a:lnSpc>
+                <a:spcPct val="100000"/>
+              </a:lnSpc>
+              <a:spcBef>
+                <a:spcPts val="0"/>
+              </a:spcBef>
+              <a:spcAft>
+                <a:spcPts val="0"/>
+              </a:spcAft>
+            </a:pPr>
+            <a:r>
+              <a:rPr lang="en-US" noProof="1"/>
+              <a:t xml:space="preserve">      dto = new ConverterResponseDTO(</a:t>
+            </a:r>
+          </a:p>
+          <a:p>
+            <a:pPr>
+              <a:lnSpc>
+                <a:spcPct val="100000"/>
+              </a:lnSpc>
+              <a:spcBef>
+                <a:spcPts val="0"/>
+              </a:spcBef>
+              <a:spcAft>
+                <a:spcPts val="0"/>
+              </a:spcAft>
+            </a:pPr>
+            <a:r>
+              <a:rPr lang="en-US" noProof="1"/>
+              <a:t xml:space="preserve">          EstadosEnum.ERROR, "Token Inválido", 0);</a:t>
+            </a:r>
+          </a:p>
+          <a:p>
+            <a:pPr>
+              <a:lnSpc>
+                <a:spcPct val="100000"/>
+              </a:lnSpc>
+              <a:spcBef>
+                <a:spcPts val="0"/>
+              </a:spcBef>
+              <a:spcAft>
+                <a:spcPts val="0"/>
+              </a:spcAft>
+            </a:pPr>
+            <a:r>
+              <a:rPr lang="en-US" noProof="1"/>
+              <a:t xml:space="preserve">      return Response.status(401).entity(dto).build();</a:t>
+            </a:r>
+          </a:p>
+          <a:p>
+            <a:pPr>
+              <a:lnSpc>
+                <a:spcPct val="100000"/>
+              </a:lnSpc>
+              <a:spcBef>
+                <a:spcPts val="0"/>
+              </a:spcBef>
+              <a:spcAft>
+                <a:spcPts val="0"/>
+              </a:spcAft>
+            </a:pPr>
+            <a:r>
+              <a:rPr lang="en-US" noProof="1"/>
+              <a:t xml:space="preserve">    }</a:t>
+            </a:r>
+          </a:p>
+          <a:p>
+            <a:pPr>
+              <a:lnSpc>
+                <a:spcPct val="100000"/>
+              </a:lnSpc>
+              <a:spcBef>
+                <a:spcPts val="0"/>
+              </a:spcBef>
+              <a:spcAft>
+                <a:spcPts val="0"/>
+              </a:spcAft>
+            </a:pPr>
+            <a:r>
+              <a:rPr lang="en-US" noProof="1"/>
+              <a:t xml:space="preserve">    // ... conversión y respuesta 200 en JSON</a:t>
+            </a:r>
+          </a:p>
+          <a:p>
+            <a:pPr>
+              <a:lnSpc>
+                <a:spcPct val="100000"/>
+              </a:lnSpc>
+              <a:spcBef>
+                <a:spcPts val="0"/>
+              </a:spcBef>
+              <a:spcAft>
+                <a:spcPts val="0"/>
+              </a:spcAft>
+            </a:pPr>
+            <a:r>
+              <a:rPr lang="en-US" noProof="1"/>
+              <a:t xml:space="preserve">  }</a:t>
+            </a:r>
+          </a:p>
+          <a:p>
+            <a:pPr>
+              <a:lnSpc>
+                <a:spcPct val="100000"/>
+              </a:lnSpc>
+              <a:spcBef>
+                <a:spcPts val="0"/>
+              </a:spcBef>
+              <a:spcAft>
+                <a:spcPts val="0"/>
+              </a:spcAft>
+            </a:pPr>
+            <a:r>
+              <a:rPr lang="en-US" noProof="1"/>
+              <a:t xml:space="preserve">}</a:t>
+            </a:r>
+          </a:p>
+        </p:txBody>
+      </p:sp>
+      <p:sp>
+        <p:nvSpPr>
+          <p:cNvPr id="4" name="Text Placeholder 3">
+            <a:extLst>
+              <a:ext uri="{FF2B5EF4-FFF2-40B4-BE49-F238E27FC236}">
+                <a16:creationId xmlns:a16="http://schemas.microsoft.com/office/drawing/2014/main" id="{0B26EB7F-8CAF-5D1F-5E05-124982840E83}"/>
+              </a:ext>
+            </a:extLst>
+          </p:cNvPr>
+          <p:cNvSpPr>
+            <a:spLocks noGrp="1"/>
+          </p:cNvSpPr>
+          <p:nvPr>
+            <p:ph type="body" sz="quarter" idx="12"/>
+          </p:nvPr>
+        </p:nvSpPr>
+        <p:spPr/>
+        <p:txBody>
+          <a:bodyPr/>
+          <a:lstStyle/>
+          <a:p>
+            <a:r>
               <a:rPr lang="es-MX"/>
-              <a:t> definición del servicio o endpoint]</a:t>
-            </a:r>
-            <a:endParaRPr lang="es-EC"/>
-          </a:p>
-        </p:txBody>
-      </p:sp>
-      <p:sp>
-        <p:nvSpPr>
-          <p:cNvPr id="4" name="Text Placeholder 3">
-            <a:extLst>
-              <a:ext uri="{FF2B5EF4-FFF2-40B4-BE49-F238E27FC236}">
-                <a16:creationId xmlns:a16="http://schemas.microsoft.com/office/drawing/2014/main" id="{0B26EB7F-8CAF-5D1F-5E05-124982840E83}"/>
-              </a:ext>
-            </a:extLst>
-          </p:cNvPr>
-          <p:cNvSpPr>
-            <a:spLocks noGrp="1"/>
-          </p:cNvSpPr>
-          <p:nvPr>
-            <p:ph type="body" sz="quarter" idx="12"/>
-          </p:nvPr>
-        </p:nvSpPr>
-        <p:spPr/>
-        <p:txBody>
-          <a:bodyPr/>
-          <a:lstStyle/>
+              <a:t>@Path, @POST y @Produces publican el recurso /api/converter, que recibe y devuelve JSON.</a:t>
+            </a:r>
+          </a:p>
           <a:p>
             <a:r>
               <a:rPr lang="es-MX"/>
-              <a:t>[Qué hace este fragmento.]</a:t>
-            </a:r>
-          </a:p>
-          <a:p>
-            <a:r>
-              <a:rPr lang="es-MX"/>
-              <a:t>[Por qué es importante en el proyecto.]</a:t>
+              <a:t>El token viaja en el encabezado Authorization; si no es válido, el servidor responde 401.</a:t>
             </a:r>
             <a:endParaRPr lang="es-EC"/>
           </a:p>
@@ -11035,13 +11301,13 @@
           <a:p>
             <a:r>
               <a:rPr lang="es-MX"/>
-              <a:t>Ejecutar el servidor desde [IDE o comando].</a:t>
+              <a:t>Ejecutar el servidor desde NetBeans 31 (Run) sobre Payara Server.</a:t>
             </a:r>
           </a:p>
           <a:p>
             <a:r>
               <a:rPr lang="es-MX"/>
-              <a:t>Comprobar [el WSDL en … | el endpoint en …].</a:t>
+              <a:t>Comprobar el endpoint en http://localhost:8080/WS_CON_UNI_JAVA_RESTFUL/api/login (POST con JSON).</a:t>
             </a:r>
           </a:p>
           <a:p>
@@ -11240,7 +11506,7 @@
           <a:p>
             <a:r>
               <a:rPr lang="es-EC"/>
-              <a:t>[Tecnología] · patrón MVC</a:t>
+              <a:t>Java 21 + HttpClient · patrón MVC</a:t>
             </a:r>
           </a:p>
         </p:txBody>
@@ -11327,7 +11593,7 @@
           <a:p>
             <a:r>
               <a:rPr lang="es-MX"/>
-              <a:t>Proyecto CONSOLE_CON_UNI_[JAVA | DOTNET]_[SOAP | RESTful] creado en [IDE].</a:t>
+              <a:t>Proyecto CONSOLE_CON_UNI_JAVA_RESTful creado en NetBeans 31.</a:t>
             </a:r>
           </a:p>
           <a:p>
@@ -11510,58 +11776,321 @@
           <a:p>
             <a:pPr>
               <a:lnSpc>
-                <a:spcPct val="110000"/>
+                <a:spcPct val="100000"/>
               </a:lnSpc>
+              <a:spcBef>
+                <a:spcPts val="0"/>
+              </a:spcBef>
+              <a:spcAft>
+                <a:spcPts val="0"/>
+              </a:spcAft>
             </a:pPr>
             <a:r>
-              <a:rPr lang="es-MX"/>
-              <a:t>[Pega aquí cómo el cliente</a:t>
+              <a:rPr lang="en-US" noProof="1"/>
+              <a:t xml:space="preserve">public class RESTfulClient {</a:t>
             </a:r>
           </a:p>
           <a:p>
             <a:pPr>
               <a:lnSpc>
-                <a:spcPct val="110000"/>
+                <a:spcPct val="100000"/>
               </a:lnSpc>
+              <a:spcBef>
+                <a:spcPts val="0"/>
+              </a:spcBef>
+              <a:spcAft>
+                <a:spcPts val="0"/>
+              </a:spcAft>
             </a:pPr>
             <a:r>
+              <a:rPr lang="en-US" noProof="1"/>
+              <a:t xml:space="preserve">  private String baseUrl =</a:t>
+            </a:r>
+          </a:p>
+          <a:p>
+            <a:pPr>
+              <a:lnSpc>
+                <a:spcPct val="100000"/>
+              </a:lnSpc>
+              <a:spcBef>
+                <a:spcPts val="0"/>
+              </a:spcBef>
+              <a:spcAft>
+                <a:spcPts val="0"/>
+              </a:spcAft>
+            </a:pPr>
+            <a:r>
+              <a:rPr lang="en-US" noProof="1"/>
+              <a:t xml:space="preserve">      "http://localhost:8080/WS_CON_UNI_JAVA_RESTFUL/api/";</a:t>
+            </a:r>
+          </a:p>
+          <a:p>
+            <a:pPr>
+              <a:lnSpc>
+                <a:spcPct val="100000"/>
+              </a:lnSpc>
+              <a:spcBef>
+                <a:spcPts val="0"/>
+              </a:spcBef>
+              <a:spcAft>
+                <a:spcPts val="0"/>
+              </a:spcAft>
+            </a:pPr>
+            <a:r>
+              <a:rPr lang="en-US" noProof="1"/>
+              <a:t xml:space="preserve">  private HttpClient http = HttpClient.newHttpClient();</a:t>
+            </a:r>
+          </a:p>
+          <a:p>
+            <a:pPr>
+              <a:lnSpc>
+                <a:spcPct val="100000"/>
+              </a:lnSpc>
+              <a:spcBef>
+                <a:spcPts val="0"/>
+              </a:spcBef>
+              <a:spcAft>
+                <a:spcPts val="0"/>
+              </a:spcAft>
+            </a:pPr>
+            <a:endParaRPr lang="en-US" noProof="1"/>
+          </a:p>
+          <a:p>
+            <a:pPr>
+              <a:lnSpc>
+                <a:spcPct val="100000"/>
+              </a:lnSpc>
+              <a:spcBef>
+                <a:spcPts val="0"/>
+              </a:spcBef>
+              <a:spcAft>
+                <a:spcPts val="0"/>
+              </a:spcAft>
+            </a:pPr>
+            <a:r>
+              <a:rPr lang="en-US" noProof="1"/>
+              <a:t xml:space="preserve">  public String get(String endpoint, String token)</a:t>
+            </a:r>
+          </a:p>
+          <a:p>
+            <a:pPr>
+              <a:lnSpc>
+                <a:spcPct val="100000"/>
+              </a:lnSpc>
+              <a:spcBef>
+                <a:spcPts val="0"/>
+              </a:spcBef>
+              <a:spcAft>
+                <a:spcPts val="0"/>
+              </a:spcAft>
+            </a:pPr>
+            <a:r>
+              <a:rPr lang="en-US" noProof="1"/>
+              <a:t xml:space="preserve">      throws IOException, InterruptedException {</a:t>
+            </a:r>
+          </a:p>
+          <a:p>
+            <a:pPr>
+              <a:lnSpc>
+                <a:spcPct val="100000"/>
+              </a:lnSpc>
+              <a:spcBef>
+                <a:spcPts val="0"/>
+              </a:spcBef>
+              <a:spcAft>
+                <a:spcPts val="0"/>
+              </a:spcAft>
+            </a:pPr>
+            <a:r>
+              <a:rPr lang="en-US" noProof="1"/>
+              <a:t xml:space="preserve">    HttpRequest request = HttpRequest.newBuilder()</a:t>
+            </a:r>
+          </a:p>
+          <a:p>
+            <a:pPr>
+              <a:lnSpc>
+                <a:spcPct val="100000"/>
+              </a:lnSpc>
+              <a:spcBef>
+                <a:spcPts val="0"/>
+              </a:spcBef>
+              <a:spcAft>
+                <a:spcPts val="0"/>
+              </a:spcAft>
+            </a:pPr>
+            <a:r>
+              <a:rPr lang="en-US" noProof="1"/>
+              <a:t xml:space="preserve">      .uri(URI.create(baseUrl + endpoint))</a:t>
+            </a:r>
+          </a:p>
+          <a:p>
+            <a:pPr>
+              <a:lnSpc>
+                <a:spcPct val="100000"/>
+              </a:lnSpc>
+              <a:spcBef>
+                <a:spcPts val="0"/>
+              </a:spcBef>
+              <a:spcAft>
+                <a:spcPts val="0"/>
+              </a:spcAft>
+            </a:pPr>
+            <a:r>
+              <a:rPr lang="en-US" noProof="1"/>
+              <a:t xml:space="preserve">      .header("Accept", "application/json")</a:t>
+            </a:r>
+          </a:p>
+          <a:p>
+            <a:pPr>
+              <a:lnSpc>
+                <a:spcPct val="100000"/>
+              </a:lnSpc>
+              <a:spcBef>
+                <a:spcPts val="0"/>
+              </a:spcBef>
+              <a:spcAft>
+                <a:spcPts val="0"/>
+              </a:spcAft>
+            </a:pPr>
+            <a:r>
+              <a:rPr lang="en-US" noProof="1"/>
+              <a:t xml:space="preserve">      .header("Authorization", token)</a:t>
+            </a:r>
+          </a:p>
+          <a:p>
+            <a:pPr>
+              <a:lnSpc>
+                <a:spcPct val="100000"/>
+              </a:lnSpc>
+              <a:spcBef>
+                <a:spcPts val="0"/>
+              </a:spcBef>
+              <a:spcAft>
+                <a:spcPts val="0"/>
+              </a:spcAft>
+            </a:pPr>
+            <a:r>
+              <a:rPr lang="en-US" noProof="1"/>
+              <a:t xml:space="preserve">      .GET()</a:t>
+            </a:r>
+          </a:p>
+          <a:p>
+            <a:pPr>
+              <a:lnSpc>
+                <a:spcPct val="100000"/>
+              </a:lnSpc>
+              <a:spcBef>
+                <a:spcPts val="0"/>
+              </a:spcBef>
+              <a:spcAft>
+                <a:spcPts val="0"/>
+              </a:spcAft>
+            </a:pPr>
+            <a:r>
+              <a:rPr lang="en-US" noProof="1"/>
+              <a:t xml:space="preserve">      .build();</a:t>
+            </a:r>
+          </a:p>
+          <a:p>
+            <a:pPr>
+              <a:lnSpc>
+                <a:spcPct val="100000"/>
+              </a:lnSpc>
+              <a:spcBef>
+                <a:spcPts val="0"/>
+              </a:spcBef>
+              <a:spcAft>
+                <a:spcPts val="0"/>
+              </a:spcAft>
+            </a:pPr>
+            <a:r>
+              <a:rPr lang="en-US" noProof="1"/>
+              <a:t xml:space="preserve">    return http.send(request,</a:t>
+            </a:r>
+          </a:p>
+          <a:p>
+            <a:pPr>
+              <a:lnSpc>
+                <a:spcPct val="100000"/>
+              </a:lnSpc>
+              <a:spcBef>
+                <a:spcPts val="0"/>
+              </a:spcBef>
+              <a:spcAft>
+                <a:spcPts val="0"/>
+              </a:spcAft>
+            </a:pPr>
+            <a:r>
+              <a:rPr lang="en-US" noProof="1"/>
+              <a:t xml:space="preserve">        HttpResponse.BodyHandlers.ofString()).body();</a:t>
+            </a:r>
+          </a:p>
+          <a:p>
+            <a:pPr>
+              <a:lnSpc>
+                <a:spcPct val="100000"/>
+              </a:lnSpc>
+              <a:spcBef>
+                <a:spcPts val="0"/>
+              </a:spcBef>
+              <a:spcAft>
+                <a:spcPts val="0"/>
+              </a:spcAft>
+            </a:pPr>
+            <a:r>
+              <a:rPr lang="en-US" noProof="1"/>
+              <a:t xml:space="preserve">  }</a:t>
+            </a:r>
+          </a:p>
+          <a:p>
+            <a:pPr>
+              <a:lnSpc>
+                <a:spcPct val="100000"/>
+              </a:lnSpc>
+              <a:spcBef>
+                <a:spcPts val="0"/>
+              </a:spcBef>
+              <a:spcAft>
+                <a:spcPts val="0"/>
+              </a:spcAft>
+            </a:pPr>
+            <a:r>
+              <a:rPr lang="en-US" noProof="1"/>
+              <a:t xml:space="preserve">}</a:t>
+            </a:r>
+          </a:p>
+        </p:txBody>
+      </p:sp>
+      <p:sp>
+        <p:nvSpPr>
+          <p:cNvPr id="4" name="Text Placeholder 3">
+            <a:extLst>
+              <a:ext uri="{FF2B5EF4-FFF2-40B4-BE49-F238E27FC236}">
+                <a16:creationId xmlns:a16="http://schemas.microsoft.com/office/drawing/2014/main" id="{532B24EF-7A3C-74C9-6C54-DEF8F61E4574}"/>
+              </a:ext>
+            </a:extLst>
+          </p:cNvPr>
+          <p:cNvSpPr>
+            <a:spLocks noGrp="1"/>
+          </p:cNvSpPr>
+          <p:nvPr>
+            <p:ph type="body" sz="quarter" idx="12"/>
+          </p:nvPr>
+        </p:nvSpPr>
+        <p:spPr/>
+        <p:txBody>
+          <a:bodyPr/>
+          <a:lstStyle/>
+          <a:p>
+            <a:r>
               <a:rPr lang="es-MX"/>
-              <a:t> llama al servidor]</a:t>
-            </a:r>
-            <a:endParaRPr lang="es-EC"/>
-          </a:p>
-        </p:txBody>
-      </p:sp>
-      <p:sp>
-        <p:nvSpPr>
-          <p:cNvPr id="4" name="Text Placeholder 3">
-            <a:extLst>
-              <a:ext uri="{FF2B5EF4-FFF2-40B4-BE49-F238E27FC236}">
-                <a16:creationId xmlns:a16="http://schemas.microsoft.com/office/drawing/2014/main" id="{532B24EF-7A3C-74C9-6C54-DEF8F61E4574}"/>
-              </a:ext>
-            </a:extLst>
-          </p:cNvPr>
-          <p:cNvSpPr>
-            <a:spLocks noGrp="1"/>
-          </p:cNvSpPr>
-          <p:nvPr>
-            <p:ph type="body" sz="quarter" idx="12"/>
-          </p:nvPr>
-        </p:nvSpPr>
-        <p:spPr/>
-        <p:txBody>
-          <a:bodyPr/>
-          <a:lstStyle/>
+              <a:t>Usa java.net.http.HttpClient (incluido en Java 21) para llamar a la API sin librerías extra.</a:t>
+            </a:r>
+          </a:p>
           <a:p>
             <a:r>
               <a:rPr lang="es-MX"/>
-              <a:t>[Qué hace este fragmento.]</a:t>
-            </a:r>
-          </a:p>
-          <a:p>
-            <a:r>
-              <a:rPr lang="es-MX"/>
-              <a:t>[Cómo maneja errores o la sesión.]</a:t>
+              <a:t>El token va en el encabezado Authorization y la respuesta JSON se lee con org.json.</a:t>
             </a:r>
             <a:endParaRPr lang="es-EC"/>
           </a:p>
@@ -11680,7 +12209,7 @@
           <a:p>
             <a:r>
               <a:rPr lang="es-MX"/>
-              <a:t>Conversión de Unidades [SOAP | RESTful] sin BDD en [JAVA | .NET]</a:t>
+              <a:t>Conversión de Unidades RESTful sin BDD en JAVA</a:t>
             </a:r>
             <a:endParaRPr lang="es-EC"/>
           </a:p>
@@ -11709,7 +12238,7 @@
           <a:p>
             <a:r>
               <a:rPr lang="pt-BR"/>
-              <a:t>[TI.1.X] · Arquitectura de Software</a:t>
+              <a:t>TI.1.3 · Arquitectura de Software</a:t>
             </a:r>
             <a:endParaRPr lang="es-EC"/>
           </a:p>
@@ -11751,7 +12280,7 @@
             </a:r>
             <a:r>
               <a:rPr lang="es-MX"/>
-              <a:t>  [Nombre Apellido] · [Nombre Apellido] · [Nombre Apellido]</a:t>
+              <a:t xml:space="preserve">  Diego Mateo Sosa Flores · Marcos David Escobar Vela · Carlos Isaac Ñato Caiza</a:t>
             </a:r>
           </a:p>
           <a:p>
@@ -11770,7 +12299,7 @@
             </a:r>
             <a:r>
               <a:rPr lang="es-MX"/>
-              <a:t>  [Ing. Nombre del tutor]</a:t>
+              <a:t xml:space="preserve">  Ing. Eduardo Mauricio Campaña Ortega</a:t>
             </a:r>
           </a:p>
           <a:p>
@@ -12152,7 +12681,7 @@
           <a:p>
             <a:r>
               <a:rPr lang="es-EC"/>
-              <a:t>[Tecnología] · patrón MVC</a:t>
+              <a:t>Java Swing + HttpClient · patrón MVC</a:t>
             </a:r>
           </a:p>
         </p:txBody>
@@ -12239,7 +12768,7 @@
           <a:p>
             <a:r>
               <a:rPr lang="es-MX"/>
-              <a:t>Proyecto ESC_CON_UNI_[JAVA | DOTNET]_[SOAP | RESTful] creado en [IDE].</a:t>
+              <a:t>Proyecto ESC_CON_UNI_JAVA_RESTful creado en NetBeans 31.</a:t>
             </a:r>
           </a:p>
           <a:p>
@@ -12422,58 +12951,338 @@
           <a:p>
             <a:pPr>
               <a:lnSpc>
-                <a:spcPct val="110000"/>
+                <a:spcPct val="100000"/>
               </a:lnSpc>
+              <a:spcBef>
+                <a:spcPts val="0"/>
+              </a:spcBef>
+              <a:spcAft>
+                <a:spcPts val="0"/>
+              </a:spcAft>
             </a:pPr>
             <a:r>
-              <a:rPr lang="es-MX"/>
-              <a:t>[Pega aquí cómo el cliente</a:t>
+              <a:rPr lang="en-US" noProof="1"/>
+              <a:t xml:space="preserve">public String post(EndpointsEnum endpoint, String json,</a:t>
             </a:r>
           </a:p>
           <a:p>
             <a:pPr>
               <a:lnSpc>
-                <a:spcPct val="110000"/>
+                <a:spcPct val="100000"/>
               </a:lnSpc>
+              <a:spcBef>
+                <a:spcPts val="0"/>
+              </a:spcBef>
+              <a:spcAft>
+                <a:spcPts val="0"/>
+              </a:spcAft>
             </a:pPr>
             <a:r>
+              <a:rPr lang="en-US" noProof="1"/>
+              <a:t xml:space="preserve">    String token) throws IOException {</a:t>
+            </a:r>
+          </a:p>
+          <a:p>
+            <a:pPr>
+              <a:lnSpc>
+                <a:spcPct val="100000"/>
+              </a:lnSpc>
+              <a:spcBef>
+                <a:spcPts val="0"/>
+              </a:spcBef>
+              <a:spcAft>
+                <a:spcPts val="0"/>
+              </a:spcAft>
+            </a:pPr>
+            <a:r>
+              <a:rPr lang="en-US" noProof="1"/>
+              <a:t xml:space="preserve">  return enviar(constructor(endpoint.toString(), token)</a:t>
+            </a:r>
+          </a:p>
+          <a:p>
+            <a:pPr>
+              <a:lnSpc>
+                <a:spcPct val="100000"/>
+              </a:lnSpc>
+              <a:spcBef>
+                <a:spcPts val="0"/>
+              </a:spcBef>
+              <a:spcAft>
+                <a:spcPts val="0"/>
+              </a:spcAft>
+            </a:pPr>
+            <a:r>
+              <a:rPr lang="en-US" noProof="1"/>
+              <a:t xml:space="preserve">      .header("Content-Type", "application/json")</a:t>
+            </a:r>
+          </a:p>
+          <a:p>
+            <a:pPr>
+              <a:lnSpc>
+                <a:spcPct val="100000"/>
+              </a:lnSpc>
+              <a:spcBef>
+                <a:spcPts val="0"/>
+              </a:spcBef>
+              <a:spcAft>
+                <a:spcPts val="0"/>
+              </a:spcAft>
+            </a:pPr>
+            <a:r>
+              <a:rPr lang="en-US" noProof="1"/>
+              <a:t xml:space="preserve">      .POST(HttpRequest.BodyPublishers.ofString(json))</a:t>
+            </a:r>
+          </a:p>
+          <a:p>
+            <a:pPr>
+              <a:lnSpc>
+                <a:spcPct val="100000"/>
+              </a:lnSpc>
+              <a:spcBef>
+                <a:spcPts val="0"/>
+              </a:spcBef>
+              <a:spcAft>
+                <a:spcPts val="0"/>
+              </a:spcAft>
+            </a:pPr>
+            <a:r>
+              <a:rPr lang="en-US" noProof="1"/>
+              <a:t xml:space="preserve">      .build());</a:t>
+            </a:r>
+          </a:p>
+          <a:p>
+            <a:pPr>
+              <a:lnSpc>
+                <a:spcPct val="100000"/>
+              </a:lnSpc>
+              <a:spcBef>
+                <a:spcPts val="0"/>
+              </a:spcBef>
+              <a:spcAft>
+                <a:spcPts val="0"/>
+              </a:spcAft>
+            </a:pPr>
+            <a:r>
+              <a:rPr lang="en-US" noProof="1"/>
+              <a:t xml:space="preserve">}</a:t>
+            </a:r>
+          </a:p>
+          <a:p>
+            <a:pPr>
+              <a:lnSpc>
+                <a:spcPct val="100000"/>
+              </a:lnSpc>
+              <a:spcBef>
+                <a:spcPts val="0"/>
+              </a:spcBef>
+              <a:spcAft>
+                <a:spcPts val="0"/>
+              </a:spcAft>
+            </a:pPr>
+            <a:endParaRPr lang="en-US" noProof="1"/>
+          </a:p>
+          <a:p>
+            <a:pPr>
+              <a:lnSpc>
+                <a:spcPct val="100000"/>
+              </a:lnSpc>
+              <a:spcBef>
+                <a:spcPts val="0"/>
+              </a:spcBef>
+              <a:spcAft>
+                <a:spcPts val="0"/>
+              </a:spcAft>
+            </a:pPr>
+            <a:r>
+              <a:rPr lang="en-US" noProof="1"/>
+              <a:t xml:space="preserve">private HttpRequest.Builder constructor(String recurso,</a:t>
+            </a:r>
+          </a:p>
+          <a:p>
+            <a:pPr>
+              <a:lnSpc>
+                <a:spcPct val="100000"/>
+              </a:lnSpc>
+              <a:spcBef>
+                <a:spcPts val="0"/>
+              </a:spcBef>
+              <a:spcAft>
+                <a:spcPts val="0"/>
+              </a:spcAft>
+            </a:pPr>
+            <a:r>
+              <a:rPr lang="en-US" noProof="1"/>
+              <a:t xml:space="preserve">    String token) {</a:t>
+            </a:r>
+          </a:p>
+          <a:p>
+            <a:pPr>
+              <a:lnSpc>
+                <a:spcPct val="100000"/>
+              </a:lnSpc>
+              <a:spcBef>
+                <a:spcPts val="0"/>
+              </a:spcBef>
+              <a:spcAft>
+                <a:spcPts val="0"/>
+              </a:spcAft>
+            </a:pPr>
+            <a:r>
+              <a:rPr lang="en-US" noProof="1"/>
+              <a:t xml:space="preserve">  HttpRequest.Builder constructor = HttpRequest.newBuilder()</a:t>
+            </a:r>
+          </a:p>
+          <a:p>
+            <a:pPr>
+              <a:lnSpc>
+                <a:spcPct val="100000"/>
+              </a:lnSpc>
+              <a:spcBef>
+                <a:spcPts val="0"/>
+              </a:spcBef>
+              <a:spcAft>
+                <a:spcPts val="0"/>
+              </a:spcAft>
+            </a:pPr>
+            <a:r>
+              <a:rPr lang="en-US" noProof="1"/>
+              <a:t xml:space="preserve">      .uri(URI.create(urlBase + recurso))</a:t>
+            </a:r>
+          </a:p>
+          <a:p>
+            <a:pPr>
+              <a:lnSpc>
+                <a:spcPct val="100000"/>
+              </a:lnSpc>
+              <a:spcBef>
+                <a:spcPts val="0"/>
+              </a:spcBef>
+              <a:spcAft>
+                <a:spcPts val="0"/>
+              </a:spcAft>
+            </a:pPr>
+            <a:r>
+              <a:rPr lang="en-US" noProof="1"/>
+              <a:t xml:space="preserve">      .timeout(REQUEST_TIMEOUT)</a:t>
+            </a:r>
+          </a:p>
+          <a:p>
+            <a:pPr>
+              <a:lnSpc>
+                <a:spcPct val="100000"/>
+              </a:lnSpc>
+              <a:spcBef>
+                <a:spcPts val="0"/>
+              </a:spcBef>
+              <a:spcAft>
+                <a:spcPts val="0"/>
+              </a:spcAft>
+            </a:pPr>
+            <a:r>
+              <a:rPr lang="en-US" noProof="1"/>
+              <a:t xml:space="preserve">      .header("Accept", "application/json");</a:t>
+            </a:r>
+          </a:p>
+          <a:p>
+            <a:pPr>
+              <a:lnSpc>
+                <a:spcPct val="100000"/>
+              </a:lnSpc>
+              <a:spcBef>
+                <a:spcPts val="0"/>
+              </a:spcBef>
+              <a:spcAft>
+                <a:spcPts val="0"/>
+              </a:spcAft>
+            </a:pPr>
+            <a:r>
+              <a:rPr lang="en-US" noProof="1"/>
+              <a:t xml:space="preserve">  if (token != null)</a:t>
+            </a:r>
+          </a:p>
+          <a:p>
+            <a:pPr>
+              <a:lnSpc>
+                <a:spcPct val="100000"/>
+              </a:lnSpc>
+              <a:spcBef>
+                <a:spcPts val="0"/>
+              </a:spcBef>
+              <a:spcAft>
+                <a:spcPts val="0"/>
+              </a:spcAft>
+            </a:pPr>
+            <a:r>
+              <a:rPr lang="en-US" noProof="1"/>
+              <a:t xml:space="preserve">    constructor.header("Authorization", token);</a:t>
+            </a:r>
+          </a:p>
+          <a:p>
+            <a:pPr>
+              <a:lnSpc>
+                <a:spcPct val="100000"/>
+              </a:lnSpc>
+              <a:spcBef>
+                <a:spcPts val="0"/>
+              </a:spcBef>
+              <a:spcAft>
+                <a:spcPts val="0"/>
+              </a:spcAft>
+            </a:pPr>
+            <a:r>
+              <a:rPr lang="en-US" noProof="1"/>
+              <a:t xml:space="preserve">  return constructor;</a:t>
+            </a:r>
+          </a:p>
+          <a:p>
+            <a:pPr>
+              <a:lnSpc>
+                <a:spcPct val="100000"/>
+              </a:lnSpc>
+              <a:spcBef>
+                <a:spcPts val="0"/>
+              </a:spcBef>
+              <a:spcAft>
+                <a:spcPts val="0"/>
+              </a:spcAft>
+            </a:pPr>
+            <a:r>
+              <a:rPr lang="en-US" noProof="1"/>
+              <a:t xml:space="preserve">}</a:t>
+            </a:r>
+          </a:p>
+        </p:txBody>
+      </p:sp>
+      <p:sp>
+        <p:nvSpPr>
+          <p:cNvPr id="4" name="Text Placeholder 3">
+            <a:extLst>
+              <a:ext uri="{FF2B5EF4-FFF2-40B4-BE49-F238E27FC236}">
+                <a16:creationId xmlns:a16="http://schemas.microsoft.com/office/drawing/2014/main" id="{20A8AF34-9793-D88F-FF58-6E72CF9E4E62}"/>
+              </a:ext>
+            </a:extLst>
+          </p:cNvPr>
+          <p:cNvSpPr>
+            <a:spLocks noGrp="1"/>
+          </p:cNvSpPr>
+          <p:nvPr>
+            <p:ph type="body" sz="quarter" idx="12"/>
+          </p:nvPr>
+        </p:nvSpPr>
+        <p:spPr/>
+        <p:txBody>
+          <a:bodyPr/>
+          <a:lstStyle/>
+          <a:p>
+            <a:r>
               <a:rPr lang="es-MX"/>
-              <a:t> llama al servidor]</a:t>
-            </a:r>
-            <a:endParaRPr lang="es-EC"/>
-          </a:p>
-        </p:txBody>
-      </p:sp>
-      <p:sp>
-        <p:nvSpPr>
-          <p:cNvPr id="4" name="Text Placeholder 3">
-            <a:extLst>
-              <a:ext uri="{FF2B5EF4-FFF2-40B4-BE49-F238E27FC236}">
-                <a16:creationId xmlns:a16="http://schemas.microsoft.com/office/drawing/2014/main" id="{20A8AF34-9793-D88F-FF58-6E72CF9E4E62}"/>
-              </a:ext>
-            </a:extLst>
-          </p:cNvPr>
-          <p:cNvSpPr>
-            <a:spLocks noGrp="1"/>
-          </p:cNvSpPr>
-          <p:nvPr>
-            <p:ph type="body" sz="quarter" idx="12"/>
-          </p:nvPr>
-        </p:nvSpPr>
-        <p:spPr/>
-        <p:txBody>
-          <a:bodyPr/>
-          <a:lstStyle/>
+              <a:t>Arma las peticiones POST con cuerpo JSON y agrega el token en Authorization cuando hay sesión.</a:t>
+            </a:r>
+          </a:p>
           <a:p>
             <a:r>
               <a:rPr lang="es-MX"/>
-              <a:t>[Qué hace este fragmento.]</a:t>
-            </a:r>
-          </a:p>
-          <a:p>
-            <a:r>
-              <a:rPr lang="es-MX"/>
-              <a:t>[Cómo maneja errores o la sesión.]</a:t>
+              <a:t>Tiene tiempos de espera de 5 s (conexión) y 15 s (petición) para no bloquear la ventana.</a:t>
             </a:r>
             <a:endParaRPr lang="es-EC"/>
           </a:p>
@@ -12904,7 +13713,7 @@
           <a:p>
             <a:r>
               <a:rPr lang="es-EC"/>
-              <a:t>[Tecnología] · patrón MVC</a:t>
+              <a:t>JSP / Servlets + HttpClient · patrón MVC</a:t>
             </a:r>
           </a:p>
         </p:txBody>
@@ -12991,7 +13800,7 @@
           <a:p>
             <a:r>
               <a:rPr lang="es-MX"/>
-              <a:t>Proyecto WEB_CON_UNI_[JAVA | DOTNET]_[SOAP | RESTful] creado en [IDE].</a:t>
+              <a:t>Proyecto WEB_CON_UNI_JAVA_RESTful creado en NetBeans 31.</a:t>
             </a:r>
           </a:p>
           <a:p>
@@ -13174,58 +13983,324 @@
           <a:p>
             <a:pPr>
               <a:lnSpc>
-                <a:spcPct val="110000"/>
+                <a:spcPct val="100000"/>
               </a:lnSpc>
+              <a:spcBef>
+                <a:spcPts val="0"/>
+              </a:spcBef>
+              <a:spcAft>
+                <a:spcPts val="0"/>
+              </a:spcAft>
             </a:pPr>
             <a:r>
-              <a:rPr lang="es-MX"/>
-              <a:t>[Pega aquí cómo el cliente</a:t>
+              <a:rPr lang="en-US" noProof="1"/>
+              <a:t xml:space="preserve">@Override</a:t>
             </a:r>
           </a:p>
           <a:p>
             <a:pPr>
               <a:lnSpc>
-                <a:spcPct val="110000"/>
+                <a:spcPct val="100000"/>
               </a:lnSpc>
+              <a:spcBef>
+                <a:spcPts val="0"/>
+              </a:spcBef>
+              <a:spcAft>
+                <a:spcPts val="0"/>
+              </a:spcAft>
             </a:pPr>
             <a:r>
+              <a:rPr lang="en-US" noProof="1"/>
+              <a:t xml:space="preserve">protected void doPost(HttpServletRequest request,</a:t>
+            </a:r>
+          </a:p>
+          <a:p>
+            <a:pPr>
+              <a:lnSpc>
+                <a:spcPct val="100000"/>
+              </a:lnSpc>
+              <a:spcBef>
+                <a:spcPts val="0"/>
+              </a:spcBef>
+              <a:spcAft>
+                <a:spcPts val="0"/>
+              </a:spcAft>
+            </a:pPr>
+            <a:r>
+              <a:rPr lang="en-US" noProof="1"/>
+              <a:t xml:space="preserve">    HttpServletResponse response)</a:t>
+            </a:r>
+          </a:p>
+          <a:p>
+            <a:pPr>
+              <a:lnSpc>
+                <a:spcPct val="100000"/>
+              </a:lnSpc>
+              <a:spcBef>
+                <a:spcPts val="0"/>
+              </a:spcBef>
+              <a:spcAft>
+                <a:spcPts val="0"/>
+              </a:spcAft>
+            </a:pPr>
+            <a:r>
+              <a:rPr lang="en-US" noProof="1"/>
+              <a:t xml:space="preserve">    throws ServletException, IOException {</a:t>
+            </a:r>
+          </a:p>
+          <a:p>
+            <a:pPr>
+              <a:lnSpc>
+                <a:spcPct val="100000"/>
+              </a:lnSpc>
+              <a:spcBef>
+                <a:spcPts val="0"/>
+              </a:spcBef>
+              <a:spcAft>
+                <a:spcPts val="0"/>
+              </a:spcAft>
+            </a:pPr>
+            <a:r>
+              <a:rPr lang="en-US" noProof="1"/>
+              <a:t xml:space="preserve">  String usuario = request.getParameter("usuario");</a:t>
+            </a:r>
+          </a:p>
+          <a:p>
+            <a:pPr>
+              <a:lnSpc>
+                <a:spcPct val="100000"/>
+              </a:lnSpc>
+              <a:spcBef>
+                <a:spcPts val="0"/>
+              </a:spcBef>
+              <a:spcAft>
+                <a:spcPts val="0"/>
+              </a:spcAft>
+            </a:pPr>
+            <a:r>
+              <a:rPr lang="en-US" noProof="1"/>
+              <a:t xml:space="preserve">  String clave = request.getParameter("clave");</a:t>
+            </a:r>
+          </a:p>
+          <a:p>
+            <a:pPr>
+              <a:lnSpc>
+                <a:spcPct val="100000"/>
+              </a:lnSpc>
+              <a:spcBef>
+                <a:spcPts val="0"/>
+              </a:spcBef>
+              <a:spcAft>
+                <a:spcPts val="0"/>
+              </a:spcAft>
+            </a:pPr>
+            <a:r>
+              <a:rPr lang="en-US" noProof="1"/>
+              <a:t xml:space="preserve">  Sesion sesion = new Sesion();</a:t>
+            </a:r>
+          </a:p>
+          <a:p>
+            <a:pPr>
+              <a:lnSpc>
+                <a:spcPct val="100000"/>
+              </a:lnSpc>
+              <a:spcBef>
+                <a:spcPts val="0"/>
+              </a:spcBef>
+              <a:spcAft>
+                <a:spcPts val="0"/>
+              </a:spcAft>
+            </a:pPr>
+            <a:r>
+              <a:rPr lang="en-US" noProof="1"/>
+              <a:t xml:space="preserve">  try {</a:t>
+            </a:r>
+          </a:p>
+          <a:p>
+            <a:pPr>
+              <a:lnSpc>
+                <a:spcPct val="100000"/>
+              </a:lnSpc>
+              <a:spcBef>
+                <a:spcPts val="0"/>
+              </a:spcBef>
+              <a:spcAft>
+                <a:spcPts val="0"/>
+              </a:spcAft>
+            </a:pPr>
+            <a:r>
+              <a:rPr lang="en-US" noProof="1"/>
+              <a:t xml:space="preserve">    ConversorServicio servicio = FabricaServicios</a:t>
+            </a:r>
+          </a:p>
+          <a:p>
+            <a:pPr>
+              <a:lnSpc>
+                <a:spcPct val="100000"/>
+              </a:lnSpc>
+              <a:spcBef>
+                <a:spcPts val="0"/>
+              </a:spcBef>
+              <a:spcAft>
+                <a:spcPts val="0"/>
+              </a:spcAft>
+            </a:pPr>
+            <a:r>
+              <a:rPr lang="en-US" noProof="1"/>
+              <a:t xml:space="preserve">        .de(getServletContext()).crearServicio(sesion);</a:t>
+            </a:r>
+          </a:p>
+          <a:p>
+            <a:pPr>
+              <a:lnSpc>
+                <a:spcPct val="100000"/>
+              </a:lnSpc>
+              <a:spcBef>
+                <a:spcPts val="0"/>
+              </a:spcBef>
+              <a:spcAft>
+                <a:spcPts val="0"/>
+              </a:spcAft>
+            </a:pPr>
+            <a:r>
+              <a:rPr lang="en-US" noProof="1"/>
+              <a:t xml:space="preserve">    servicio.iniciarSesion(usuario.trim(), clave);</a:t>
+            </a:r>
+          </a:p>
+          <a:p>
+            <a:pPr>
+              <a:lnSpc>
+                <a:spcPct val="100000"/>
+              </a:lnSpc>
+              <a:spcBef>
+                <a:spcPts val="0"/>
+              </a:spcBef>
+              <a:spcAft>
+                <a:spcPts val="0"/>
+              </a:spcAft>
+            </a:pPr>
+            <a:r>
+              <a:rPr lang="en-US" noProof="1"/>
+              <a:t xml:space="preserve">    SesionUsuario.guardar(nuevaSesion(request), sesion, servicio);</a:t>
+            </a:r>
+          </a:p>
+          <a:p>
+            <a:pPr>
+              <a:lnSpc>
+                <a:spcPct val="100000"/>
+              </a:lnSpc>
+              <a:spcBef>
+                <a:spcPts val="0"/>
+              </a:spcBef>
+              <a:spcAft>
+                <a:spcPts val="0"/>
+              </a:spcAft>
+            </a:pPr>
+            <a:r>
+              <a:rPr lang="en-US" noProof="1"/>
+              <a:t xml:space="preserve">    response.sendRedirect(request.getContextPath() + "/menu");</a:t>
+            </a:r>
+          </a:p>
+          <a:p>
+            <a:pPr>
+              <a:lnSpc>
+                <a:spcPct val="100000"/>
+              </a:lnSpc>
+              <a:spcBef>
+                <a:spcPts val="0"/>
+              </a:spcBef>
+              <a:spcAft>
+                <a:spcPts val="0"/>
+              </a:spcAft>
+            </a:pPr>
+            <a:r>
+              <a:rPr lang="en-US" noProof="1"/>
+              <a:t xml:space="preserve">  } catch (ServicioException e) {</a:t>
+            </a:r>
+          </a:p>
+          <a:p>
+            <a:pPr>
+              <a:lnSpc>
+                <a:spcPct val="100000"/>
+              </a:lnSpc>
+              <a:spcBef>
+                <a:spcPts val="0"/>
+              </a:spcBef>
+              <a:spcAft>
+                <a:spcPts val="0"/>
+              </a:spcAft>
+            </a:pPr>
+            <a:r>
+              <a:rPr lang="en-US" noProof="1"/>
+              <a:t xml:space="preserve">    mostrar(request, response, usuario, e.getMessage());</a:t>
+            </a:r>
+          </a:p>
+          <a:p>
+            <a:pPr>
+              <a:lnSpc>
+                <a:spcPct val="100000"/>
+              </a:lnSpc>
+              <a:spcBef>
+                <a:spcPts val="0"/>
+              </a:spcBef>
+              <a:spcAft>
+                <a:spcPts val="0"/>
+              </a:spcAft>
+            </a:pPr>
+            <a:r>
+              <a:rPr lang="en-US" noProof="1"/>
+              <a:t xml:space="preserve">  }</a:t>
+            </a:r>
+          </a:p>
+          <a:p>
+            <a:pPr>
+              <a:lnSpc>
+                <a:spcPct val="100000"/>
+              </a:lnSpc>
+              <a:spcBef>
+                <a:spcPts val="0"/>
+              </a:spcBef>
+              <a:spcAft>
+                <a:spcPts val="0"/>
+              </a:spcAft>
+            </a:pPr>
+            <a:r>
+              <a:rPr lang="en-US" noProof="1"/>
+              <a:t xml:space="preserve">}</a:t>
+            </a:r>
+          </a:p>
+        </p:txBody>
+      </p:sp>
+      <p:sp>
+        <p:nvSpPr>
+          <p:cNvPr id="4" name="Text Placeholder 3">
+            <a:extLst>
+              <a:ext uri="{FF2B5EF4-FFF2-40B4-BE49-F238E27FC236}">
+                <a16:creationId xmlns:a16="http://schemas.microsoft.com/office/drawing/2014/main" id="{083ED04C-DD32-D005-5F14-AF65141A1F3E}"/>
+              </a:ext>
+            </a:extLst>
+          </p:cNvPr>
+          <p:cNvSpPr>
+            <a:spLocks noGrp="1"/>
+          </p:cNvSpPr>
+          <p:nvPr>
+            <p:ph type="body" sz="quarter" idx="12"/>
+          </p:nvPr>
+        </p:nvSpPr>
+        <p:spPr/>
+        <p:txBody>
+          <a:bodyPr/>
+          <a:lstStyle/>
+          <a:p>
+            <a:r>
               <a:rPr lang="es-MX"/>
-              <a:t> llama al servidor]</a:t>
-            </a:r>
-            <a:endParaRPr lang="es-EC"/>
-          </a:p>
-        </p:txBody>
-      </p:sp>
-      <p:sp>
-        <p:nvSpPr>
-          <p:cNvPr id="4" name="Text Placeholder 3">
-            <a:extLst>
-              <a:ext uri="{FF2B5EF4-FFF2-40B4-BE49-F238E27FC236}">
-                <a16:creationId xmlns:a16="http://schemas.microsoft.com/office/drawing/2014/main" id="{083ED04C-DD32-D005-5F14-AF65141A1F3E}"/>
-              </a:ext>
-            </a:extLst>
-          </p:cNvPr>
-          <p:cNvSpPr>
-            <a:spLocks noGrp="1"/>
-          </p:cNvSpPr>
-          <p:nvPr>
-            <p:ph type="body" sz="quarter" idx="12"/>
-          </p:nvPr>
-        </p:nvSpPr>
-        <p:spPr/>
-        <p:txBody>
-          <a:bodyPr/>
-          <a:lstStyle/>
+              <a:t>El servlet recibe el formulario de login y llama a la API REST mediante ConversorServicio y RESTfulClient.</a:t>
+            </a:r>
+          </a:p>
           <a:p>
             <a:r>
               <a:rPr lang="es-MX"/>
-              <a:t>[Qué hace este fragmento.]</a:t>
-            </a:r>
-          </a:p>
-          <a:p>
-            <a:r>
-              <a:rPr lang="es-MX"/>
-              <a:t>[Cómo maneja errores o la sesión.]</a:t>
+              <a:t>Guarda la sesión en una HttpSession nueva; si falla, vuelve a mostrar el login con el mensaje de error.</a:t>
             </a:r>
             <a:endParaRPr lang="es-EC"/>
           </a:p>
@@ -13656,7 +14731,7 @@
           <a:p>
             <a:r>
               <a:rPr lang="es-EC"/>
-              <a:t>[Tecnología] · patrón MVC</a:t>
+              <a:t>Android (Java) · patrón MVC</a:t>
             </a:r>
           </a:p>
         </p:txBody>
@@ -13778,7 +14853,7 @@
             </a:r>
             <a:r>
               <a:rPr lang="es-EC" sz="2200"/>
-              <a:t>   Servidor [SOAP | RESTful]</a:t>
+              <a:t xml:space="preserve">   Servidor RESTful</a:t>
             </a:r>
           </a:p>
           <a:p>
@@ -14068,7 +15143,7 @@
           <a:p>
             <a:r>
               <a:rPr lang="es-MX"/>
-              <a:t>Proyecto MOV_CON_UNI_[JAVA | DOTNET]_[SOAP | RESTful] creado en [IDE].</a:t>
+              <a:t>Proyecto MOV_CON_UNI_JAVA_RESTFUL creado en NetBeans 31 (Java with Gradle).</a:t>
             </a:r>
           </a:p>
           <a:p>
@@ -14251,58 +15326,409 @@
           <a:p>
             <a:pPr>
               <a:lnSpc>
-                <a:spcPct val="110000"/>
+                <a:spcPct val="100000"/>
               </a:lnSpc>
+              <a:spcBef>
+                <a:spcPts val="0"/>
+              </a:spcBef>
+              <a:spcAft>
+                <a:spcPts val="0"/>
+              </a:spcAft>
             </a:pPr>
             <a:r>
-              <a:rPr lang="es-MX"/>
-              <a:t>[Pega aquí cómo el cliente</a:t>
+              <a:rPr lang="en-US" noProof="1"/>
+              <a:t xml:space="preserve">private RespuestaHttp enviar(String metodo, String ruta,</a:t>
             </a:r>
           </a:p>
           <a:p>
             <a:pPr>
               <a:lnSpc>
-                <a:spcPct val="110000"/>
+                <a:spcPct val="100000"/>
               </a:lnSpc>
+              <a:spcBef>
+                <a:spcPts val="0"/>
+              </a:spcBef>
+              <a:spcAft>
+                <a:spcPts val="0"/>
+              </a:spcAft>
             </a:pPr>
             <a:r>
+              <a:rPr lang="en-US" noProof="1"/>
+              <a:t xml:space="preserve">    String json, String token) throws IOException {</a:t>
+            </a:r>
+          </a:p>
+          <a:p>
+            <a:pPr>
+              <a:lnSpc>
+                <a:spcPct val="100000"/>
+              </a:lnSpc>
+              <a:spcBef>
+                <a:spcPts val="0"/>
+              </a:spcBef>
+              <a:spcAft>
+                <a:spcPts val="0"/>
+              </a:spcAft>
+            </a:pPr>
+            <a:r>
+              <a:rPr lang="en-US" noProof="1"/>
+              <a:t xml:space="preserve">  HttpURLConnection conexion = (HttpURLConnection)</a:t>
+            </a:r>
+          </a:p>
+          <a:p>
+            <a:pPr>
+              <a:lnSpc>
+                <a:spcPct val="100000"/>
+              </a:lnSpc>
+              <a:spcBef>
+                <a:spcPts val="0"/>
+              </a:spcBef>
+              <a:spcAft>
+                <a:spcPts val="0"/>
+              </a:spcAft>
+            </a:pPr>
+            <a:r>
+              <a:rPr lang="en-US" noProof="1"/>
+              <a:t xml:space="preserve">      new URL(urlBase + ruta).openConnection();</a:t>
+            </a:r>
+          </a:p>
+          <a:p>
+            <a:pPr>
+              <a:lnSpc>
+                <a:spcPct val="100000"/>
+              </a:lnSpc>
+              <a:spcBef>
+                <a:spcPts val="0"/>
+              </a:spcBef>
+              <a:spcAft>
+                <a:spcPts val="0"/>
+              </a:spcAft>
+            </a:pPr>
+            <a:r>
+              <a:rPr lang="en-US" noProof="1"/>
+              <a:t xml:space="preserve">  conexion.setRequestMethod(metodo);</a:t>
+            </a:r>
+          </a:p>
+          <a:p>
+            <a:pPr>
+              <a:lnSpc>
+                <a:spcPct val="100000"/>
+              </a:lnSpc>
+              <a:spcBef>
+                <a:spcPts val="0"/>
+              </a:spcBef>
+              <a:spcAft>
+                <a:spcPts val="0"/>
+              </a:spcAft>
+            </a:pPr>
+            <a:r>
+              <a:rPr lang="en-US" noProof="1"/>
+              <a:t xml:space="preserve">  conexion.setRequestProperty("Accept", "application/json");</a:t>
+            </a:r>
+          </a:p>
+          <a:p>
+            <a:pPr>
+              <a:lnSpc>
+                <a:spcPct val="100000"/>
+              </a:lnSpc>
+              <a:spcBef>
+                <a:spcPts val="0"/>
+              </a:spcBef>
+              <a:spcAft>
+                <a:spcPts val="0"/>
+              </a:spcAft>
+            </a:pPr>
+            <a:r>
+              <a:rPr lang="en-US" noProof="1"/>
+              <a:t xml:space="preserve">  if (token != null)</a:t>
+            </a:r>
+          </a:p>
+          <a:p>
+            <a:pPr>
+              <a:lnSpc>
+                <a:spcPct val="100000"/>
+              </a:lnSpc>
+              <a:spcBef>
+                <a:spcPts val="0"/>
+              </a:spcBef>
+              <a:spcAft>
+                <a:spcPts val="0"/>
+              </a:spcAft>
+            </a:pPr>
+            <a:r>
+              <a:rPr lang="en-US" noProof="1"/>
+              <a:t xml:space="preserve">    conexion.setRequestProperty("Authorization", token);</a:t>
+            </a:r>
+          </a:p>
+          <a:p>
+            <a:pPr>
+              <a:lnSpc>
+                <a:spcPct val="100000"/>
+              </a:lnSpc>
+              <a:spcBef>
+                <a:spcPts val="0"/>
+              </a:spcBef>
+              <a:spcAft>
+                <a:spcPts val="0"/>
+              </a:spcAft>
+            </a:pPr>
+            <a:r>
+              <a:rPr lang="en-US" noProof="1"/>
+              <a:t xml:space="preserve">  if (json != null) {</a:t>
+            </a:r>
+          </a:p>
+          <a:p>
+            <a:pPr>
+              <a:lnSpc>
+                <a:spcPct val="100000"/>
+              </a:lnSpc>
+              <a:spcBef>
+                <a:spcPts val="0"/>
+              </a:spcBef>
+              <a:spcAft>
+                <a:spcPts val="0"/>
+              </a:spcAft>
+            </a:pPr>
+            <a:r>
+              <a:rPr lang="en-US" noProof="1"/>
+              <a:t xml:space="preserve">    conexion.setDoOutput(true);</a:t>
+            </a:r>
+          </a:p>
+          <a:p>
+            <a:pPr>
+              <a:lnSpc>
+                <a:spcPct val="100000"/>
+              </a:lnSpc>
+              <a:spcBef>
+                <a:spcPts val="0"/>
+              </a:spcBef>
+              <a:spcAft>
+                <a:spcPts val="0"/>
+              </a:spcAft>
+            </a:pPr>
+            <a:r>
+              <a:rPr lang="en-US" noProof="1"/>
+              <a:t xml:space="preserve">    conexion.setRequestProperty("Content-Type",</a:t>
+            </a:r>
+          </a:p>
+          <a:p>
+            <a:pPr>
+              <a:lnSpc>
+                <a:spcPct val="100000"/>
+              </a:lnSpc>
+              <a:spcBef>
+                <a:spcPts val="0"/>
+              </a:spcBef>
+              <a:spcAft>
+                <a:spcPts val="0"/>
+              </a:spcAft>
+            </a:pPr>
+            <a:r>
+              <a:rPr lang="en-US" noProof="1"/>
+              <a:t xml:space="preserve">        "application/json; charset=utf-8");</a:t>
+            </a:r>
+          </a:p>
+          <a:p>
+            <a:pPr>
+              <a:lnSpc>
+                <a:spcPct val="100000"/>
+              </a:lnSpc>
+              <a:spcBef>
+                <a:spcPts val="0"/>
+              </a:spcBef>
+              <a:spcAft>
+                <a:spcPts val="0"/>
+              </a:spcAft>
+            </a:pPr>
+            <a:r>
+              <a:rPr lang="en-US" noProof="1"/>
+              <a:t xml:space="preserve">    try (OutputStream salida = conexion.getOutputStream()) {</a:t>
+            </a:r>
+          </a:p>
+          <a:p>
+            <a:pPr>
+              <a:lnSpc>
+                <a:spcPct val="100000"/>
+              </a:lnSpc>
+              <a:spcBef>
+                <a:spcPts val="0"/>
+              </a:spcBef>
+              <a:spcAft>
+                <a:spcPts val="0"/>
+              </a:spcAft>
+            </a:pPr>
+            <a:r>
+              <a:rPr lang="en-US" noProof="1"/>
+              <a:t xml:space="preserve">      salida.write(json.getBytes(StandardCharsets.UTF_8));</a:t>
+            </a:r>
+          </a:p>
+          <a:p>
+            <a:pPr>
+              <a:lnSpc>
+                <a:spcPct val="100000"/>
+              </a:lnSpc>
+              <a:spcBef>
+                <a:spcPts val="0"/>
+              </a:spcBef>
+              <a:spcAft>
+                <a:spcPts val="0"/>
+              </a:spcAft>
+            </a:pPr>
+            <a:r>
+              <a:rPr lang="en-US" noProof="1"/>
+              <a:t xml:space="preserve">    }</a:t>
+            </a:r>
+          </a:p>
+          <a:p>
+            <a:pPr>
+              <a:lnSpc>
+                <a:spcPct val="100000"/>
+              </a:lnSpc>
+              <a:spcBef>
+                <a:spcPts val="0"/>
+              </a:spcBef>
+              <a:spcAft>
+                <a:spcPts val="0"/>
+              </a:spcAft>
+            </a:pPr>
+            <a:r>
+              <a:rPr lang="en-US" noProof="1"/>
+              <a:t xml:space="preserve">  }</a:t>
+            </a:r>
+          </a:p>
+          <a:p>
+            <a:pPr>
+              <a:lnSpc>
+                <a:spcPct val="100000"/>
+              </a:lnSpc>
+              <a:spcBef>
+                <a:spcPts val="0"/>
+              </a:spcBef>
+              <a:spcAft>
+                <a:spcPts val="0"/>
+              </a:spcAft>
+            </a:pPr>
+            <a:r>
+              <a:rPr lang="en-US" noProof="1"/>
+              <a:t xml:space="preserve">  int codigo = conexion.getResponseCode();</a:t>
+            </a:r>
+          </a:p>
+          <a:p>
+            <a:pPr>
+              <a:lnSpc>
+                <a:spcPct val="100000"/>
+              </a:lnSpc>
+              <a:spcBef>
+                <a:spcPts val="0"/>
+              </a:spcBef>
+              <a:spcAft>
+                <a:spcPts val="0"/>
+              </a:spcAft>
+            </a:pPr>
+            <a:r>
+              <a:rPr lang="en-US" noProof="1"/>
+              <a:t xml:space="preserve">  InputStream flujo = codigo &gt;= 400</a:t>
+            </a:r>
+          </a:p>
+          <a:p>
+            <a:pPr>
+              <a:lnSpc>
+                <a:spcPct val="100000"/>
+              </a:lnSpc>
+              <a:spcBef>
+                <a:spcPts val="0"/>
+              </a:spcBef>
+              <a:spcAft>
+                <a:spcPts val="0"/>
+              </a:spcAft>
+            </a:pPr>
+            <a:r>
+              <a:rPr lang="en-US" noProof="1"/>
+              <a:t xml:space="preserve">      ? conexion.getErrorStream() : conexion.getInputStream();</a:t>
+            </a:r>
+          </a:p>
+          <a:p>
+            <a:pPr>
+              <a:lnSpc>
+                <a:spcPct val="100000"/>
+              </a:lnSpc>
+              <a:spcBef>
+                <a:spcPts val="0"/>
+              </a:spcBef>
+              <a:spcAft>
+                <a:spcPts val="0"/>
+              </a:spcAft>
+            </a:pPr>
+            <a:r>
+              <a:rPr lang="en-US" noProof="1"/>
+              <a:t xml:space="preserve">  return new RespuestaHttp(codigo,</a:t>
+            </a:r>
+          </a:p>
+          <a:p>
+            <a:pPr>
+              <a:lnSpc>
+                <a:spcPct val="100000"/>
+              </a:lnSpc>
+              <a:spcBef>
+                <a:spcPts val="0"/>
+              </a:spcBef>
+              <a:spcAft>
+                <a:spcPts val="0"/>
+              </a:spcAft>
+            </a:pPr>
+            <a:r>
+              <a:rPr lang="en-US" noProof="1"/>
+              <a:t xml:space="preserve">      conexion.getResponseMessage(), leer(flujo));</a:t>
+            </a:r>
+          </a:p>
+          <a:p>
+            <a:pPr>
+              <a:lnSpc>
+                <a:spcPct val="100000"/>
+              </a:lnSpc>
+              <a:spcBef>
+                <a:spcPts val="0"/>
+              </a:spcBef>
+              <a:spcAft>
+                <a:spcPts val="0"/>
+              </a:spcAft>
+            </a:pPr>
+            <a:r>
+              <a:rPr lang="en-US" noProof="1"/>
+              <a:t xml:space="preserve">}</a:t>
+            </a:r>
+          </a:p>
+        </p:txBody>
+      </p:sp>
+      <p:sp>
+        <p:nvSpPr>
+          <p:cNvPr id="4" name="Text Placeholder 3">
+            <a:extLst>
+              <a:ext uri="{FF2B5EF4-FFF2-40B4-BE49-F238E27FC236}">
+                <a16:creationId xmlns:a16="http://schemas.microsoft.com/office/drawing/2014/main" id="{8FA2B0E7-A824-A64D-CD4D-F66FF99B63E7}"/>
+              </a:ext>
+            </a:extLst>
+          </p:cNvPr>
+          <p:cNvSpPr>
+            <a:spLocks noGrp="1"/>
+          </p:cNvSpPr>
+          <p:nvPr>
+            <p:ph type="body" sz="quarter" idx="12"/>
+          </p:nvPr>
+        </p:nvSpPr>
+        <p:spPr/>
+        <p:txBody>
+          <a:bodyPr/>
+          <a:lstStyle/>
+          <a:p>
+            <a:r>
               <a:rPr lang="es-MX"/>
-              <a:t> llama al servidor]</a:t>
-            </a:r>
-            <a:endParaRPr lang="es-EC"/>
-          </a:p>
-        </p:txBody>
-      </p:sp>
-      <p:sp>
-        <p:nvSpPr>
-          <p:cNvPr id="4" name="Text Placeholder 3">
-            <a:extLst>
-              <a:ext uri="{FF2B5EF4-FFF2-40B4-BE49-F238E27FC236}">
-                <a16:creationId xmlns:a16="http://schemas.microsoft.com/office/drawing/2014/main" id="{8FA2B0E7-A824-A64D-CD4D-F66FF99B63E7}"/>
-              </a:ext>
-            </a:extLst>
-          </p:cNvPr>
-          <p:cNvSpPr>
-            <a:spLocks noGrp="1"/>
-          </p:cNvSpPr>
-          <p:nvPr>
-            <p:ph type="body" sz="quarter" idx="12"/>
-          </p:nvPr>
-        </p:nvSpPr>
-        <p:spPr/>
-        <p:txBody>
-          <a:bodyPr/>
-          <a:lstStyle/>
+              <a:t>Un solo método envía GET y POST con HttpURLConnection, disponible en Android sin librerías extra.</a:t>
+            </a:r>
+          </a:p>
           <a:p>
             <a:r>
               <a:rPr lang="es-MX"/>
-              <a:t>[Qué hace este fragmento.]</a:t>
-            </a:r>
-          </a:p>
-          <a:p>
-            <a:r>
-              <a:rPr lang="es-MX"/>
-              <a:t>[Cómo maneja errores o la sesión.]</a:t>
+              <a:t>Lee el cuerpo también en errores (400, 401) para mostrar el mensaje que devuelve el servidor.</a:t>
             </a:r>
             <a:endParaRPr lang="es-EC"/>
           </a:p>
@@ -16492,13 +17918,13 @@
           <a:p>
             <a:r>
               <a:rPr lang="es-MX"/>
-              <a:t>[Pruebas automáticas: N pruebas, todas correctas.]</a:t>
+              <a:t>236 pruebas automáticas: escritorio (72), web (81) y móvil (83).</a:t>
             </a:r>
           </a:p>
           <a:p>
             <a:r>
               <a:rPr lang="es-MX"/>
-              <a:t>[Herramienta usada: JUnit | xUnit].</a:t>
+              <a:t>Herramienta usada: JUnit 5 (y Mockito en el cliente web).</a:t>
             </a:r>
           </a:p>
           <a:p>
@@ -16669,7 +18095,7 @@
           <a:p>
             <a:r>
               <a:rPr lang="es-MX"/>
-              <a:t>El servidor [SOAP | RESTful] fue consumido por cuatro clientes distintos sin cambiar su lógica, lo que muestra la interoperabilidad de una arquitectura orientada a servicios.</a:t>
+              <a:t>El servidor RESTful fue consumido por cuatro clientes distintos sin cambiar su lógica, lo que muestra la interoperabilidad de una arquitectura orientada a servicios.</a:t>
             </a:r>
           </a:p>
           <a:p>
@@ -16687,7 +18113,7 @@
           <a:p>
             <a:r>
               <a:rPr lang="es-MX"/>
-              <a:t>[Conclusión propia del proyecto.]</a:t>
+              <a:t>JAX-RS permitió publicar los recursos con anotaciones (@Path, @GET, @POST) y responder JSON con códigos HTTP 200 y 401.</a:t>
             </a:r>
             <a:endParaRPr lang="es-EC"/>
           </a:p>
@@ -16840,7 +18266,7 @@
           <a:p>
             <a:r>
               <a:rPr lang="es-MX"/>
-              <a:t>Usar HTTPS [y WS-Security] para proteger el token en la red.</a:t>
+              <a:t>Usar HTTPS para proteger el token en la red.</a:t>
             </a:r>
           </a:p>
           <a:p>
@@ -16852,7 +18278,7 @@
           <a:p>
             <a:r>
               <a:rPr lang="es-MX"/>
-              <a:t>[Recomendación propia del proyecto.]</a:t>
+              <a:t>Documentar la API con OpenAPI para facilitar su consumo desde nuevos clientes.</a:t>
             </a:r>
             <a:endParaRPr lang="es-EC"/>
           </a:p>
@@ -17039,7 +18465,7 @@
             </a:pPr>
             <a:r>
               <a:rPr lang="es-EC" sz="1500"/>
-              <a:t>[Autor. (Año). Título. Editorial o URL.]</a:t>
+              <a:t>Eclipse Foundation. (2024). Jakarta RESTful Web Services 4.0. https://jakarta.ee/specifications/restful-ws/4.0/</a:t>
             </a:r>
           </a:p>
         </p:txBody>
@@ -17288,7 +18714,7 @@
             </a:pPr>
             <a:r>
               <a:rPr lang="es-MX"/>
-              <a:t>Desarrollar un sistema de conversión de unidades basado en un servicio web [SOAP | RESTful] en [JAVA | .NET], sin base de datos, consumido por clientes de consola, escritorio, web y móvil.</a:t>
+              <a:t>Desarrollar un sistema de conversión de unidades basado en un servicio web RESTful en JAVA, sin base de datos, consumido por clientes de consola, escritorio, web y móvil.</a:t>
             </a:r>
             <a:endParaRPr lang="es-EC"/>
           </a:p>
@@ -17331,7 +18757,7 @@
           <a:p>
             <a:r>
               <a:rPr lang="es-MX"/>
-              <a:t>Implementar el servidor [SOAP | RESTful] con autenticación por token y conversión de seis magnitudes.</a:t>
+              <a:t>Implementar el servidor RESTful con autenticación por token y conversión de seis magnitudes.</a:t>
             </a:r>
           </a:p>
           <a:p>
@@ -17577,7 +19003,7 @@
           <a:p>
             <a:r>
               <a:rPr lang="es-MX"/>
-              <a:t>[SOAP y WSDL | REST y JSON]</a:t>
+              <a:t>REST y JSON</a:t>
             </a:r>
             <a:endParaRPr lang="es-EC"/>
           </a:p>
@@ -17606,19 +19032,13 @@
           <a:p>
             <a:r>
               <a:rPr lang="es-MX"/>
-              <a:t>[SOAP] Intercambia mensajes XML dentro de un sobre (Envelope). Un contrato WSDL describe las operaciones del servicio.</a:t>
+              <a:t>Expone recursos por URL que se usan con verbos HTTP (GET, POST) e intercambian datos en JSON.</a:t>
             </a:r>
           </a:p>
           <a:p>
             <a:r>
               <a:rPr lang="es-MX"/>
-              <a:t>[RESTful] Expone recursos por URL que se usan con verbos HTTP (GET, POST) e intercambian datos en JSON.</a:t>
-            </a:r>
-          </a:p>
-          <a:p>
-            <a:r>
-              <a:rPr lang="es-MX"/>
-              <a:t>[Borra la opción que no corresponde y agrega una ventaja del protocolo.]</a:t>
+              <a:t>Ventaja: los mensajes JSON son livianos y cualquier cliente HTTP los consume sin generar código.</a:t>
             </a:r>
             <a:endParaRPr lang="es-EC"/>
           </a:p>
@@ -18234,7 +19654,7 @@
                           </a:solidFill>
                           <a:latin typeface="Segoe UI" panose="020B0502040204020203" pitchFamily="34" charset="0"/>
                         </a:rPr>
-                        <a:t>[Ej.: ASP.NET Core + SoapCore | Jakarta EE en Payara]</a:t>
+                        <a:t>Jakarta EE en Payara (JAX-RS)</a:t>
                       </a:r>
                       <a:endParaRPr lang="es-EC" sz="1400">
                         <a:solidFill>
@@ -18272,7 +19692,7 @@
                           </a:solidFill>
                           <a:latin typeface="Segoe UI" panose="020B0502040204020203" pitchFamily="34" charset="0"/>
                         </a:rPr>
-                        <a:t>[x.y]</a:t>
+                        <a:t>Jakarta EE 11</a:t>
                       </a:r>
                     </a:p>
                   </a:txBody>
@@ -18343,7 +19763,7 @@
                           </a:solidFill>
                           <a:latin typeface="Segoe UI" panose="020B0502040204020203" pitchFamily="34" charset="0"/>
                         </a:rPr>
-                        <a:t>[Tecnología]</a:t>
+                        <a:t>Java HttpClient + org.json</a:t>
                       </a:r>
                     </a:p>
                   </a:txBody>
@@ -18375,7 +19795,7 @@
                           </a:solidFill>
                           <a:latin typeface="Segoe UI" panose="020B0502040204020203" pitchFamily="34" charset="0"/>
                         </a:rPr>
-                        <a:t>[x.y]</a:t>
+                        <a:t>Java 21</a:t>
                       </a:r>
                     </a:p>
                   </a:txBody>
@@ -18446,7 +19866,7 @@
                           </a:solidFill>
                           <a:latin typeface="Segoe UI" panose="020B0502040204020203" pitchFamily="34" charset="0"/>
                         </a:rPr>
-                        <a:t>[Tecnología]</a:t>
+                        <a:t>Java Swing + HttpClient</a:t>
                       </a:r>
                     </a:p>
                   </a:txBody>
@@ -18478,7 +19898,7 @@
                           </a:solidFill>
                           <a:latin typeface="Segoe UI" panose="020B0502040204020203" pitchFamily="34" charset="0"/>
                         </a:rPr>
-                        <a:t>[x.y]</a:t>
+                        <a:t>Java 25</a:t>
                       </a:r>
                     </a:p>
                   </a:txBody>
@@ -18549,7 +19969,7 @@
                           </a:solidFill>
                           <a:latin typeface="Segoe UI" panose="020B0502040204020203" pitchFamily="34" charset="0"/>
                         </a:rPr>
-                        <a:t>[Tecnología]</a:t>
+                        <a:t>JSP / Servlets + HttpClient</a:t>
                       </a:r>
                     </a:p>
                   </a:txBody>
@@ -18581,7 +20001,7 @@
                           </a:solidFill>
                           <a:latin typeface="Segoe UI" panose="020B0502040204020203" pitchFamily="34" charset="0"/>
                         </a:rPr>
-                        <a:t>[x.y]</a:t>
+                        <a:t>Jakarta EE 11</a:t>
                       </a:r>
                     </a:p>
                   </a:txBody>
@@ -18652,7 +20072,7 @@
                           </a:solidFill>
                           <a:latin typeface="Segoe UI" panose="020B0502040204020203" pitchFamily="34" charset="0"/>
                         </a:rPr>
-                        <a:t>[Tecnología]</a:t>
+                        <a:t>Android (Java) + HttpURLConnection</a:t>
                       </a:r>
                     </a:p>
                   </a:txBody>
@@ -18684,7 +20104,7 @@
                           </a:solidFill>
                           <a:latin typeface="Segoe UI" panose="020B0502040204020203" pitchFamily="34" charset="0"/>
                         </a:rPr>
-                        <a:t>[x.y]</a:t>
+                        <a:t>Android SDK 36 · Java 17</a:t>
                       </a:r>
                     </a:p>
                   </a:txBody>
@@ -18755,7 +20175,7 @@
                           </a:solidFill>
                           <a:latin typeface="Segoe UI" panose="020B0502040204020203" pitchFamily="34" charset="0"/>
                         </a:rPr>
-                        <a:t>[IDE, gestor de paquetes, emulador]</a:t>
+                        <a:t>NetBeans 31, Maven, Gradle, emulador Android</a:t>
                       </a:r>
                     </a:p>
                   </a:txBody>
@@ -18787,7 +20207,7 @@
                           </a:solidFill>
                           <a:latin typeface="Segoe UI" panose="020B0502040204020203" pitchFamily="34" charset="0"/>
                         </a:rPr>
-                        <a:t>[x.y]</a:t>
+                        <a:t>NetBeans 31</a:t>
                       </a:r>
                     </a:p>
                   </a:txBody>
@@ -19012,7 +20432,7 @@
                 </a:solidFill>
                 <a:latin typeface="Segoe UI Semibold" panose="020B0702040204020203" pitchFamily="34" charset="0"/>
               </a:rPr>
-              <a:t>Servidor [SOAP | RESTful]</a:t>
+              <a:t>Servidor RESTful</a:t>
             </a:r>
           </a:p>
           <a:p>
@@ -19028,7 +20448,7 @@
                 </a:solidFill>
                 <a:latin typeface="Segoe UI" panose="020B0502040204020203" pitchFamily="34" charset="0"/>
               </a:rPr>
-              <a:t>[JAVA | .NET] · [localhost:puerto]</a:t>
+              <a:t>JAVA · localhost:8080</a:t>
             </a:r>
           </a:p>
           <a:p>
@@ -19132,7 +20552,7 @@
                 </a:solidFill>
                 <a:latin typeface="Segoe UI" panose="020B0502040204020203" pitchFamily="34" charset="0"/>
               </a:rPr>
-              <a:t>[Tecnología]</a:t>
+              <a:t>Java HttpClient</a:t>
             </a:r>
           </a:p>
         </p:txBody>
@@ -19263,7 +20683,7 @@
                 </a:solidFill>
                 <a:latin typeface="Segoe UI" panose="020B0502040204020203" pitchFamily="34" charset="0"/>
               </a:rPr>
-              <a:t>[Tecnología]</a:t>
+              <a:t>Java Swing</a:t>
             </a:r>
           </a:p>
         </p:txBody>
@@ -19394,7 +20814,7 @@
                 </a:solidFill>
                 <a:latin typeface="Segoe UI" panose="020B0502040204020203" pitchFamily="34" charset="0"/>
               </a:rPr>
-              <a:t>[Tecnología]</a:t>
+              <a:t>JSP / Servlets</a:t>
             </a:r>
           </a:p>
         </p:txBody>
@@ -19525,7 +20945,7 @@
                 </a:solidFill>
                 <a:latin typeface="Segoe UI" panose="020B0502040204020203" pitchFamily="34" charset="0"/>
               </a:rPr>
-              <a:t>[Tecnología]</a:t>
+              <a:t>Android (Java)</a:t>
             </a:r>
           </a:p>
         </p:txBody>
@@ -19609,7 +21029,7 @@
                 </a:solidFill>
                 <a:latin typeface="Segoe UI" panose="020B0502040204020203" pitchFamily="34" charset="0"/>
               </a:rPr>
-              <a:t>Comunicación: [mensajes SOAP en XML | HTTP con JSON] · autenticación por token en cada llamada</a:t>
+              <a:t>Comunicación: HTTP con JSON · autenticación por token en cada llamada</a:t>
             </a:r>
             <a:endParaRPr lang="es-EC" sz="1400">
               <a:solidFill>
